--- a/templates/t1_shashin_don.pptx
+++ b/templates/t1_shashin_don.pptx
@@ -4037,7 +4037,7 @@
                 </a:solidFill>
                 <a:latin typeface="BIZ UDPゴシック"/>
               </a:rPr>
-              <a:t>（この四角を消して、画像をドラッグ）</a:t>
+              <a:t>（この四角を消して 画像をドラッグ）</a:t>
             </a:r>
           </a:p>
         </p:txBody>
@@ -4076,7 +4076,7 @@
                 </a:solidFill>
                 <a:latin typeface="BIZ UDPゴシック"/>
               </a:rPr>
-              <a:t>気づいたこと、</a:t>
+              <a:t>気づいたこと</a:t>
             </a:r>
           </a:p>
           <a:p>
